--- a/guided/templates/pptx/通用簡報模板_TEMPLATE.pptx
+++ b/guided/templates/pptx/通用簡報模板_TEMPLATE.pptx
@@ -466,94 +466,6 @@
 </p:notesMaster>
 </file>
 
-<file path=ppt/notesSlides/notesSlide1.xml><?xml version="1.0" encoding="utf-8"?>
-<p:notes xmlns:a="http://schemas.openxmlformats.org/drawingml/2006/main" xmlns:r="http://schemas.openxmlformats.org/officeDocument/2006/relationships" xmlns:p="http://schemas.openxmlformats.org/presentationml/2006/main">
-  <p:cSld>
-    <p:spTree>
-      <p:nvGrpSpPr>
-        <p:cNvPr id="1" name=""/>
-        <p:cNvGrpSpPr/>
-        <p:nvPr/>
-      </p:nvGrpSpPr>
-      <p:grpSpPr>
-        <a:xfrm>
-          <a:off x="0" y="0"/>
-          <a:ext cx="0" cy="0"/>
-          <a:chOff x="0" y="0"/>
-          <a:chExt cx="0" cy="0"/>
-        </a:xfrm>
-      </p:grpSpPr>
-      <p:sp>
-        <p:nvSpPr>
-          <p:cNvPr id="2" name="Slide Image Placeholder 1"/>
-          <p:cNvSpPr>
-            <a:spLocks noGrp="1" noRot="1" noChangeAspect="1"/>
-          </p:cNvSpPr>
-          <p:nvPr>
-            <p:ph type="sldImg"/>
-          </p:nvPr>
-        </p:nvSpPr>
-        <p:spPr/>
-      </p:sp>
-      <p:sp>
-        <p:nvSpPr>
-          <p:cNvPr id="3" name="Notes Placeholder 2"/>
-          <p:cNvSpPr>
-            <a:spLocks noGrp="1"/>
-          </p:cNvSpPr>
-          <p:nvPr>
-            <p:ph type="body" idx="1"/>
-          </p:nvPr>
-        </p:nvSpPr>
-        <p:spPr/>
-        <p:txBody>
-          <a:bodyPr/>
-          <a:lstStyle/>
-          <a:p>
-            <a:r>
-              <a:rPr lang="en-US" dirty="0"/>
-              <a:t/>
-            </a:r>
-            <a:endParaRPr lang="en-US" dirty="0"/>
-          </a:p>
-        </p:txBody>
-      </p:sp>
-      <p:sp>
-        <p:nvSpPr>
-          <p:cNvPr id="4" name="Slide Number Placeholder 3"/>
-          <p:cNvSpPr>
-            <a:spLocks noGrp="1"/>
-          </p:cNvSpPr>
-          <p:nvPr>
-            <p:ph type="sldNum" sz="quarter" idx="10"/>
-          </p:nvPr>
-        </p:nvSpPr>
-        <p:spPr/>
-        <p:txBody>
-          <a:bodyPr/>
-          <a:lstStyle/>
-          <a:p>
-            <a:fld id="{F7021451-1387-4CA6-816F-3879F97B5CBC}" type="slidenum">
-              <a:rPr lang="en-US"/>
-              <a:t>1</a:t>
-            </a:fld>
-            <a:endParaRPr lang="en-US"/>
-          </a:p>
-        </p:txBody>
-      </p:sp>
-    </p:spTree>
-    <p:extLst>
-      <p:ext uri="{BB962C8B-B14F-4D97-AF65-F5344CB8AC3E}">
-        <p14:creationId xmlns:p14="http://schemas.microsoft.com/office/powerpoint/2010/main" val="1024086991"/>
-      </p:ext>
-    </p:extLst>
-  </p:cSld>
-  <p:clrMapOvr>
-    <a:masterClrMapping/>
-  </p:clrMapOvr>
-</p:notes>
-</file>
-
 <file path=ppt/notesSlides/notesSlide12.xml><?xml version="1.0" encoding="utf-8"?>
 <p:notes xmlns:a="http://schemas.openxmlformats.org/drawingml/2006/main" xmlns:r="http://schemas.openxmlformats.org/officeDocument/2006/relationships" xmlns:p="http://schemas.openxmlformats.org/presentationml/2006/main">
   <p:cSld>
@@ -624,622 +536,6 @@
             <a:fld id="{F7021451-1387-4CA6-816F-3879F97B5CBC}" type="slidenum">
               <a:rPr lang="en-US"/>
               <a:t>12</a:t>
-            </a:fld>
-            <a:endParaRPr lang="en-US"/>
-          </a:p>
-        </p:txBody>
-      </p:sp>
-    </p:spTree>
-    <p:extLst>
-      <p:ext uri="{BB962C8B-B14F-4D97-AF65-F5344CB8AC3E}">
-        <p14:creationId xmlns:p14="http://schemas.microsoft.com/office/powerpoint/2010/main" val="1024086991"/>
-      </p:ext>
-    </p:extLst>
-  </p:cSld>
-  <p:clrMapOvr>
-    <a:masterClrMapping/>
-  </p:clrMapOvr>
-</p:notes>
-</file>
-
-<file path=ppt/notesSlides/notesSlide2.xml><?xml version="1.0" encoding="utf-8"?>
-<p:notes xmlns:a="http://schemas.openxmlformats.org/drawingml/2006/main" xmlns:r="http://schemas.openxmlformats.org/officeDocument/2006/relationships" xmlns:p="http://schemas.openxmlformats.org/presentationml/2006/main">
-  <p:cSld>
-    <p:spTree>
-      <p:nvGrpSpPr>
-        <p:cNvPr id="1" name=""/>
-        <p:cNvGrpSpPr/>
-        <p:nvPr/>
-      </p:nvGrpSpPr>
-      <p:grpSpPr>
-        <a:xfrm>
-          <a:off x="0" y="0"/>
-          <a:ext cx="0" cy="0"/>
-          <a:chOff x="0" y="0"/>
-          <a:chExt cx="0" cy="0"/>
-        </a:xfrm>
-      </p:grpSpPr>
-      <p:sp>
-        <p:nvSpPr>
-          <p:cNvPr id="2" name="Slide Image Placeholder 1"/>
-          <p:cNvSpPr>
-            <a:spLocks noGrp="1" noRot="1" noChangeAspect="1"/>
-          </p:cNvSpPr>
-          <p:nvPr>
-            <p:ph type="sldImg"/>
-          </p:nvPr>
-        </p:nvSpPr>
-        <p:spPr/>
-      </p:sp>
-      <p:sp>
-        <p:nvSpPr>
-          <p:cNvPr id="3" name="Notes Placeholder 2"/>
-          <p:cNvSpPr>
-            <a:spLocks noGrp="1"/>
-          </p:cNvSpPr>
-          <p:nvPr>
-            <p:ph type="body" idx="1"/>
-          </p:nvPr>
-        </p:nvSpPr>
-        <p:spPr/>
-        <p:txBody>
-          <a:bodyPr/>
-          <a:lstStyle/>
-          <a:p>
-            <a:r>
-              <a:rPr lang="en-US" dirty="0"/>
-              <a:t/>
-            </a:r>
-            <a:endParaRPr lang="en-US" dirty="0"/>
-          </a:p>
-        </p:txBody>
-      </p:sp>
-      <p:sp>
-        <p:nvSpPr>
-          <p:cNvPr id="4" name="Slide Number Placeholder 3"/>
-          <p:cNvSpPr>
-            <a:spLocks noGrp="1"/>
-          </p:cNvSpPr>
-          <p:nvPr>
-            <p:ph type="sldNum" sz="quarter" idx="10"/>
-          </p:nvPr>
-        </p:nvSpPr>
-        <p:spPr/>
-        <p:txBody>
-          <a:bodyPr/>
-          <a:lstStyle/>
-          <a:p>
-            <a:fld id="{F7021451-1387-4CA6-816F-3879F97B5CBC}" type="slidenum">
-              <a:rPr lang="en-US"/>
-              <a:t>2</a:t>
-            </a:fld>
-            <a:endParaRPr lang="en-US"/>
-          </a:p>
-        </p:txBody>
-      </p:sp>
-    </p:spTree>
-    <p:extLst>
-      <p:ext uri="{BB962C8B-B14F-4D97-AF65-F5344CB8AC3E}">
-        <p14:creationId xmlns:p14="http://schemas.microsoft.com/office/powerpoint/2010/main" val="1024086991"/>
-      </p:ext>
-    </p:extLst>
-  </p:cSld>
-  <p:clrMapOvr>
-    <a:masterClrMapping/>
-  </p:clrMapOvr>
-</p:notes>
-</file>
-
-<file path=ppt/notesSlides/notesSlide3.xml><?xml version="1.0" encoding="utf-8"?>
-<p:notes xmlns:a="http://schemas.openxmlformats.org/drawingml/2006/main" xmlns:r="http://schemas.openxmlformats.org/officeDocument/2006/relationships" xmlns:p="http://schemas.openxmlformats.org/presentationml/2006/main">
-  <p:cSld>
-    <p:spTree>
-      <p:nvGrpSpPr>
-        <p:cNvPr id="1" name=""/>
-        <p:cNvGrpSpPr/>
-        <p:nvPr/>
-      </p:nvGrpSpPr>
-      <p:grpSpPr>
-        <a:xfrm>
-          <a:off x="0" y="0"/>
-          <a:ext cx="0" cy="0"/>
-          <a:chOff x="0" y="0"/>
-          <a:chExt cx="0" cy="0"/>
-        </a:xfrm>
-      </p:grpSpPr>
-      <p:sp>
-        <p:nvSpPr>
-          <p:cNvPr id="2" name="Slide Image Placeholder 1"/>
-          <p:cNvSpPr>
-            <a:spLocks noGrp="1" noRot="1" noChangeAspect="1"/>
-          </p:cNvSpPr>
-          <p:nvPr>
-            <p:ph type="sldImg"/>
-          </p:nvPr>
-        </p:nvSpPr>
-        <p:spPr/>
-      </p:sp>
-      <p:sp>
-        <p:nvSpPr>
-          <p:cNvPr id="3" name="Notes Placeholder 2"/>
-          <p:cNvSpPr>
-            <a:spLocks noGrp="1"/>
-          </p:cNvSpPr>
-          <p:nvPr>
-            <p:ph type="body" idx="1"/>
-          </p:nvPr>
-        </p:nvSpPr>
-        <p:spPr/>
-        <p:txBody>
-          <a:bodyPr/>
-          <a:lstStyle/>
-          <a:p>
-            <a:r>
-              <a:rPr lang="en-US" dirty="0"/>
-              <a:t/>
-            </a:r>
-            <a:endParaRPr lang="en-US" dirty="0"/>
-          </a:p>
-        </p:txBody>
-      </p:sp>
-      <p:sp>
-        <p:nvSpPr>
-          <p:cNvPr id="4" name="Slide Number Placeholder 3"/>
-          <p:cNvSpPr>
-            <a:spLocks noGrp="1"/>
-          </p:cNvSpPr>
-          <p:nvPr>
-            <p:ph type="sldNum" sz="quarter" idx="10"/>
-          </p:nvPr>
-        </p:nvSpPr>
-        <p:spPr/>
-        <p:txBody>
-          <a:bodyPr/>
-          <a:lstStyle/>
-          <a:p>
-            <a:fld id="{F7021451-1387-4CA6-816F-3879F97B5CBC}" type="slidenum">
-              <a:rPr lang="en-US"/>
-              <a:t>3</a:t>
-            </a:fld>
-            <a:endParaRPr lang="en-US"/>
-          </a:p>
-        </p:txBody>
-      </p:sp>
-    </p:spTree>
-    <p:extLst>
-      <p:ext uri="{BB962C8B-B14F-4D97-AF65-F5344CB8AC3E}">
-        <p14:creationId xmlns:p14="http://schemas.microsoft.com/office/powerpoint/2010/main" val="1024086991"/>
-      </p:ext>
-    </p:extLst>
-  </p:cSld>
-  <p:clrMapOvr>
-    <a:masterClrMapping/>
-  </p:clrMapOvr>
-</p:notes>
-</file>
-
-<file path=ppt/notesSlides/notesSlide4.xml><?xml version="1.0" encoding="utf-8"?>
-<p:notes xmlns:a="http://schemas.openxmlformats.org/drawingml/2006/main" xmlns:r="http://schemas.openxmlformats.org/officeDocument/2006/relationships" xmlns:p="http://schemas.openxmlformats.org/presentationml/2006/main">
-  <p:cSld>
-    <p:spTree>
-      <p:nvGrpSpPr>
-        <p:cNvPr id="1" name=""/>
-        <p:cNvGrpSpPr/>
-        <p:nvPr/>
-      </p:nvGrpSpPr>
-      <p:grpSpPr>
-        <a:xfrm>
-          <a:off x="0" y="0"/>
-          <a:ext cx="0" cy="0"/>
-          <a:chOff x="0" y="0"/>
-          <a:chExt cx="0" cy="0"/>
-        </a:xfrm>
-      </p:grpSpPr>
-      <p:sp>
-        <p:nvSpPr>
-          <p:cNvPr id="2" name="Slide Image Placeholder 1"/>
-          <p:cNvSpPr>
-            <a:spLocks noGrp="1" noRot="1" noChangeAspect="1"/>
-          </p:cNvSpPr>
-          <p:nvPr>
-            <p:ph type="sldImg"/>
-          </p:nvPr>
-        </p:nvSpPr>
-        <p:spPr/>
-      </p:sp>
-      <p:sp>
-        <p:nvSpPr>
-          <p:cNvPr id="3" name="Notes Placeholder 2"/>
-          <p:cNvSpPr>
-            <a:spLocks noGrp="1"/>
-          </p:cNvSpPr>
-          <p:nvPr>
-            <p:ph type="body" idx="1"/>
-          </p:nvPr>
-        </p:nvSpPr>
-        <p:spPr/>
-        <p:txBody>
-          <a:bodyPr/>
-          <a:lstStyle/>
-          <a:p>
-            <a:r>
-              <a:rPr lang="en-US" dirty="0"/>
-              <a:t/>
-            </a:r>
-            <a:endParaRPr lang="en-US" dirty="0"/>
-          </a:p>
-        </p:txBody>
-      </p:sp>
-      <p:sp>
-        <p:nvSpPr>
-          <p:cNvPr id="4" name="Slide Number Placeholder 3"/>
-          <p:cNvSpPr>
-            <a:spLocks noGrp="1"/>
-          </p:cNvSpPr>
-          <p:nvPr>
-            <p:ph type="sldNum" sz="quarter" idx="10"/>
-          </p:nvPr>
-        </p:nvSpPr>
-        <p:spPr/>
-        <p:txBody>
-          <a:bodyPr/>
-          <a:lstStyle/>
-          <a:p>
-            <a:fld id="{F7021451-1387-4CA6-816F-3879F97B5CBC}" type="slidenum">
-              <a:rPr lang="en-US"/>
-              <a:t>4</a:t>
-            </a:fld>
-            <a:endParaRPr lang="en-US"/>
-          </a:p>
-        </p:txBody>
-      </p:sp>
-    </p:spTree>
-    <p:extLst>
-      <p:ext uri="{BB962C8B-B14F-4D97-AF65-F5344CB8AC3E}">
-        <p14:creationId xmlns:p14="http://schemas.microsoft.com/office/powerpoint/2010/main" val="1024086991"/>
-      </p:ext>
-    </p:extLst>
-  </p:cSld>
-  <p:clrMapOvr>
-    <a:masterClrMapping/>
-  </p:clrMapOvr>
-</p:notes>
-</file>
-
-<file path=ppt/notesSlides/notesSlide5.xml><?xml version="1.0" encoding="utf-8"?>
-<p:notes xmlns:a="http://schemas.openxmlformats.org/drawingml/2006/main" xmlns:r="http://schemas.openxmlformats.org/officeDocument/2006/relationships" xmlns:p="http://schemas.openxmlformats.org/presentationml/2006/main">
-  <p:cSld>
-    <p:spTree>
-      <p:nvGrpSpPr>
-        <p:cNvPr id="1" name=""/>
-        <p:cNvGrpSpPr/>
-        <p:nvPr/>
-      </p:nvGrpSpPr>
-      <p:grpSpPr>
-        <a:xfrm>
-          <a:off x="0" y="0"/>
-          <a:ext cx="0" cy="0"/>
-          <a:chOff x="0" y="0"/>
-          <a:chExt cx="0" cy="0"/>
-        </a:xfrm>
-      </p:grpSpPr>
-      <p:sp>
-        <p:nvSpPr>
-          <p:cNvPr id="2" name="Slide Image Placeholder 1"/>
-          <p:cNvSpPr>
-            <a:spLocks noGrp="1" noRot="1" noChangeAspect="1"/>
-          </p:cNvSpPr>
-          <p:nvPr>
-            <p:ph type="sldImg"/>
-          </p:nvPr>
-        </p:nvSpPr>
-        <p:spPr/>
-      </p:sp>
-      <p:sp>
-        <p:nvSpPr>
-          <p:cNvPr id="3" name="Notes Placeholder 2"/>
-          <p:cNvSpPr>
-            <a:spLocks noGrp="1"/>
-          </p:cNvSpPr>
-          <p:nvPr>
-            <p:ph type="body" idx="1"/>
-          </p:nvPr>
-        </p:nvSpPr>
-        <p:spPr/>
-        <p:txBody>
-          <a:bodyPr/>
-          <a:lstStyle/>
-          <a:p>
-            <a:r>
-              <a:rPr lang="en-US" dirty="0"/>
-              <a:t/>
-            </a:r>
-            <a:endParaRPr lang="en-US" dirty="0"/>
-          </a:p>
-        </p:txBody>
-      </p:sp>
-      <p:sp>
-        <p:nvSpPr>
-          <p:cNvPr id="4" name="Slide Number Placeholder 3"/>
-          <p:cNvSpPr>
-            <a:spLocks noGrp="1"/>
-          </p:cNvSpPr>
-          <p:nvPr>
-            <p:ph type="sldNum" sz="quarter" idx="10"/>
-          </p:nvPr>
-        </p:nvSpPr>
-        <p:spPr/>
-        <p:txBody>
-          <a:bodyPr/>
-          <a:lstStyle/>
-          <a:p>
-            <a:fld id="{F7021451-1387-4CA6-816F-3879F97B5CBC}" type="slidenum">
-              <a:rPr lang="en-US"/>
-              <a:t>5</a:t>
-            </a:fld>
-            <a:endParaRPr lang="en-US"/>
-          </a:p>
-        </p:txBody>
-      </p:sp>
-    </p:spTree>
-    <p:extLst>
-      <p:ext uri="{BB962C8B-B14F-4D97-AF65-F5344CB8AC3E}">
-        <p14:creationId xmlns:p14="http://schemas.microsoft.com/office/powerpoint/2010/main" val="1024086991"/>
-      </p:ext>
-    </p:extLst>
-  </p:cSld>
-  <p:clrMapOvr>
-    <a:masterClrMapping/>
-  </p:clrMapOvr>
-</p:notes>
-</file>
-
-<file path=ppt/notesSlides/notesSlide6.xml><?xml version="1.0" encoding="utf-8"?>
-<p:notes xmlns:a="http://schemas.openxmlformats.org/drawingml/2006/main" xmlns:r="http://schemas.openxmlformats.org/officeDocument/2006/relationships" xmlns:p="http://schemas.openxmlformats.org/presentationml/2006/main">
-  <p:cSld>
-    <p:spTree>
-      <p:nvGrpSpPr>
-        <p:cNvPr id="1" name=""/>
-        <p:cNvGrpSpPr/>
-        <p:nvPr/>
-      </p:nvGrpSpPr>
-      <p:grpSpPr>
-        <a:xfrm>
-          <a:off x="0" y="0"/>
-          <a:ext cx="0" cy="0"/>
-          <a:chOff x="0" y="0"/>
-          <a:chExt cx="0" cy="0"/>
-        </a:xfrm>
-      </p:grpSpPr>
-      <p:sp>
-        <p:nvSpPr>
-          <p:cNvPr id="2" name="Slide Image Placeholder 1"/>
-          <p:cNvSpPr>
-            <a:spLocks noGrp="1" noRot="1" noChangeAspect="1"/>
-          </p:cNvSpPr>
-          <p:nvPr>
-            <p:ph type="sldImg"/>
-          </p:nvPr>
-        </p:nvSpPr>
-        <p:spPr/>
-      </p:sp>
-      <p:sp>
-        <p:nvSpPr>
-          <p:cNvPr id="3" name="Notes Placeholder 2"/>
-          <p:cNvSpPr>
-            <a:spLocks noGrp="1"/>
-          </p:cNvSpPr>
-          <p:nvPr>
-            <p:ph type="body" idx="1"/>
-          </p:nvPr>
-        </p:nvSpPr>
-        <p:spPr/>
-        <p:txBody>
-          <a:bodyPr/>
-          <a:lstStyle/>
-          <a:p>
-            <a:r>
-              <a:rPr lang="en-US" dirty="0"/>
-              <a:t/>
-            </a:r>
-            <a:endParaRPr lang="en-US" dirty="0"/>
-          </a:p>
-        </p:txBody>
-      </p:sp>
-      <p:sp>
-        <p:nvSpPr>
-          <p:cNvPr id="4" name="Slide Number Placeholder 3"/>
-          <p:cNvSpPr>
-            <a:spLocks noGrp="1"/>
-          </p:cNvSpPr>
-          <p:nvPr>
-            <p:ph type="sldNum" sz="quarter" idx="10"/>
-          </p:nvPr>
-        </p:nvSpPr>
-        <p:spPr/>
-        <p:txBody>
-          <a:bodyPr/>
-          <a:lstStyle/>
-          <a:p>
-            <a:fld id="{F7021451-1387-4CA6-816F-3879F97B5CBC}" type="slidenum">
-              <a:rPr lang="en-US"/>
-              <a:t>6</a:t>
-            </a:fld>
-            <a:endParaRPr lang="en-US"/>
-          </a:p>
-        </p:txBody>
-      </p:sp>
-    </p:spTree>
-    <p:extLst>
-      <p:ext uri="{BB962C8B-B14F-4D97-AF65-F5344CB8AC3E}">
-        <p14:creationId xmlns:p14="http://schemas.microsoft.com/office/powerpoint/2010/main" val="1024086991"/>
-      </p:ext>
-    </p:extLst>
-  </p:cSld>
-  <p:clrMapOvr>
-    <a:masterClrMapping/>
-  </p:clrMapOvr>
-</p:notes>
-</file>
-
-<file path=ppt/notesSlides/notesSlide7.xml><?xml version="1.0" encoding="utf-8"?>
-<p:notes xmlns:a="http://schemas.openxmlformats.org/drawingml/2006/main" xmlns:r="http://schemas.openxmlformats.org/officeDocument/2006/relationships" xmlns:p="http://schemas.openxmlformats.org/presentationml/2006/main">
-  <p:cSld>
-    <p:spTree>
-      <p:nvGrpSpPr>
-        <p:cNvPr id="1" name=""/>
-        <p:cNvGrpSpPr/>
-        <p:nvPr/>
-      </p:nvGrpSpPr>
-      <p:grpSpPr>
-        <a:xfrm>
-          <a:off x="0" y="0"/>
-          <a:ext cx="0" cy="0"/>
-          <a:chOff x="0" y="0"/>
-          <a:chExt cx="0" cy="0"/>
-        </a:xfrm>
-      </p:grpSpPr>
-      <p:sp>
-        <p:nvSpPr>
-          <p:cNvPr id="2" name="Slide Image Placeholder 1"/>
-          <p:cNvSpPr>
-            <a:spLocks noGrp="1" noRot="1" noChangeAspect="1"/>
-          </p:cNvSpPr>
-          <p:nvPr>
-            <p:ph type="sldImg"/>
-          </p:nvPr>
-        </p:nvSpPr>
-        <p:spPr/>
-      </p:sp>
-      <p:sp>
-        <p:nvSpPr>
-          <p:cNvPr id="3" name="Notes Placeholder 2"/>
-          <p:cNvSpPr>
-            <a:spLocks noGrp="1"/>
-          </p:cNvSpPr>
-          <p:nvPr>
-            <p:ph type="body" idx="1"/>
-          </p:nvPr>
-        </p:nvSpPr>
-        <p:spPr/>
-        <p:txBody>
-          <a:bodyPr/>
-          <a:lstStyle/>
-          <a:p>
-            <a:r>
-              <a:rPr lang="en-US" dirty="0"/>
-              <a:t/>
-            </a:r>
-            <a:endParaRPr lang="en-US" dirty="0"/>
-          </a:p>
-        </p:txBody>
-      </p:sp>
-      <p:sp>
-        <p:nvSpPr>
-          <p:cNvPr id="4" name="Slide Number Placeholder 3"/>
-          <p:cNvSpPr>
-            <a:spLocks noGrp="1"/>
-          </p:cNvSpPr>
-          <p:nvPr>
-            <p:ph type="sldNum" sz="quarter" idx="10"/>
-          </p:nvPr>
-        </p:nvSpPr>
-        <p:spPr/>
-        <p:txBody>
-          <a:bodyPr/>
-          <a:lstStyle/>
-          <a:p>
-            <a:fld id="{F7021451-1387-4CA6-816F-3879F97B5CBC}" type="slidenum">
-              <a:rPr lang="en-US"/>
-              <a:t>7</a:t>
-            </a:fld>
-            <a:endParaRPr lang="en-US"/>
-          </a:p>
-        </p:txBody>
-      </p:sp>
-    </p:spTree>
-    <p:extLst>
-      <p:ext uri="{BB962C8B-B14F-4D97-AF65-F5344CB8AC3E}">
-        <p14:creationId xmlns:p14="http://schemas.microsoft.com/office/powerpoint/2010/main" val="1024086991"/>
-      </p:ext>
-    </p:extLst>
-  </p:cSld>
-  <p:clrMapOvr>
-    <a:masterClrMapping/>
-  </p:clrMapOvr>
-</p:notes>
-</file>
-
-<file path=ppt/notesSlides/notesSlide8.xml><?xml version="1.0" encoding="utf-8"?>
-<p:notes xmlns:a="http://schemas.openxmlformats.org/drawingml/2006/main" xmlns:r="http://schemas.openxmlformats.org/officeDocument/2006/relationships" xmlns:p="http://schemas.openxmlformats.org/presentationml/2006/main">
-  <p:cSld>
-    <p:spTree>
-      <p:nvGrpSpPr>
-        <p:cNvPr id="1" name=""/>
-        <p:cNvGrpSpPr/>
-        <p:nvPr/>
-      </p:nvGrpSpPr>
-      <p:grpSpPr>
-        <a:xfrm>
-          <a:off x="0" y="0"/>
-          <a:ext cx="0" cy="0"/>
-          <a:chOff x="0" y="0"/>
-          <a:chExt cx="0" cy="0"/>
-        </a:xfrm>
-      </p:grpSpPr>
-      <p:sp>
-        <p:nvSpPr>
-          <p:cNvPr id="2" name="Slide Image Placeholder 1"/>
-          <p:cNvSpPr>
-            <a:spLocks noGrp="1" noRot="1" noChangeAspect="1"/>
-          </p:cNvSpPr>
-          <p:nvPr>
-            <p:ph type="sldImg"/>
-          </p:nvPr>
-        </p:nvSpPr>
-        <p:spPr/>
-      </p:sp>
-      <p:sp>
-        <p:nvSpPr>
-          <p:cNvPr id="3" name="Notes Placeholder 2"/>
-          <p:cNvSpPr>
-            <a:spLocks noGrp="1"/>
-          </p:cNvSpPr>
-          <p:nvPr>
-            <p:ph type="body" idx="1"/>
-          </p:nvPr>
-        </p:nvSpPr>
-        <p:spPr/>
-        <p:txBody>
-          <a:bodyPr/>
-          <a:lstStyle/>
-          <a:p>
-            <a:r>
-              <a:rPr lang="en-US" dirty="0"/>
-              <a:t/>
-            </a:r>
-            <a:endParaRPr lang="en-US" dirty="0"/>
-          </a:p>
-        </p:txBody>
-      </p:sp>
-      <p:sp>
-        <p:nvSpPr>
-          <p:cNvPr id="4" name="Slide Number Placeholder 3"/>
-          <p:cNvSpPr>
-            <a:spLocks noGrp="1"/>
-          </p:cNvSpPr>
-          <p:nvPr>
-            <p:ph type="sldNum" sz="quarter" idx="10"/>
-          </p:nvPr>
-        </p:nvSpPr>
-        <p:spPr/>
-        <p:txBody>
-          <a:bodyPr/>
-          <a:lstStyle/>
-          <a:p>
-            <a:fld id="{F7021451-1387-4CA6-816F-3879F97B5CBC}" type="slidenum">
-              <a:rPr lang="en-US"/>
-              <a:t>8</a:t>
             </a:fld>
             <a:endParaRPr lang="en-US"/>
           </a:p>
@@ -1855,37 +1151,6 @@
       </p:sp>
       <p:sp>
         <p:nvSpPr>
-          <p:cNvPr id="6" name="Shape 4"/>
-          <p:cNvSpPr/>
-          <p:nvPr/>
-        </p:nvSpPr>
-        <p:spPr>
-          <a:xfrm>
-            <a:off x="548640" y="1737360"/>
-            <a:ext cx="7498080" cy="2011680"/>
-          </a:xfrm>
-          <a:prstGeom prst="roundRect">
-            <a:avLst>
-              <a:gd name="adj" fmla="val 4545"/>
-            </a:avLst>
-          </a:prstGeom>
-          <a:solidFill>
-            <a:srgbClr val="FFF5EB"/>
-          </a:solidFill>
-          <a:ln w="25400">
-            <a:solidFill>
-              <a:srgbClr val="FFAB40"/>
-            </a:solidFill>
-            <a:prstDash val="solid"/>
-          </a:ln>
-        </p:spPr>
-        <p:txBody>
-          <a:bodyPr/>
-          <a:p/>
-        </p:txBody>
-      </p:sp>
-      <p:sp>
-        <p:nvSpPr>
           <p:cNvPr id="7" name="Text 5"/>
           <p:cNvSpPr/>
           <p:nvPr/>
@@ -3370,65 +2635,6 @@
               <a:t>重點名稱</a:t>
             </a:r>
             <a:endParaRPr lang="en-US" sz="2000" dirty="0"/>
-          </a:p>
-        </p:txBody>
-      </p:sp>
-      <p:sp>
-        <p:nvSpPr>
-          <p:cNvPr id="7" name="Shape 5"/>
-          <p:cNvSpPr/>
-          <p:nvPr/>
-        </p:nvSpPr>
-        <p:spPr>
-          <a:xfrm>
-            <a:off x="7498080" y="3108960"/>
-            <a:ext cx="1280160" cy="1463040"/>
-          </a:xfrm>
-          <a:prstGeom prst="roundRect">
-            <a:avLst>
-              <a:gd name="adj" fmla="val 7143"/>
-            </a:avLst>
-          </a:prstGeom>
-          <a:solidFill>
-            <a:srgbClr val="F0E6D3"/>
-          </a:solidFill>
-          <a:ln w="12700">
-            <a:solidFill>
-              <a:srgbClr val="E0E0E0"/>
-            </a:solidFill>
-            <a:prstDash val="solid"/>
-          </a:ln>
-        </p:spPr>
-        <p:txBody>
-          <a:bodyPr/>
-          <a:p/>
-        </p:txBody>
-      </p:sp>
-      <p:sp>
-        <p:nvSpPr>
-          <p:cNvPr id="8" name="Text 6"/>
-          <p:cNvSpPr/>
-          <p:nvPr/>
-        </p:nvSpPr>
-        <p:spPr>
-          <a:xfrm>
-            <a:off x="7498080" y="3108960"/>
-            <a:ext cx="1280160" cy="1463040"/>
-          </a:xfrm>
-          <a:prstGeom prst="rect">
-            <a:avLst/>
-          </a:prstGeom>
-          <a:noFill/>
-          <a:ln/>
-        </p:spPr>
-        <p:txBody>
-          <a:bodyPr wrap="square" rtlCol="0" anchor="ctr"/>
-          <a:lstStyle/>
-          <a:p>
-            <a:pPr algn="ctr" indent="0" marL="0">
-              <a:buNone/>
-            </a:pPr>
-            <a:endParaRPr lang="en-US" sz="1200" dirty="0"/>
           </a:p>
         </p:txBody>
       </p:sp>

--- a/guided/templates/pptx/通用簡報模板_TEMPLATE.pptx
+++ b/guided/templates/pptx/通用簡報模板_TEMPLATE.pptx
@@ -1008,7 +1008,7 @@
         <p:spPr>
           <a:xfrm>
             <a:off x="457200" y="4160520"/>
-            <a:ext cx="2907792" cy="347472"/>
+            <a:ext cx="653552" cy="347472"/>
           </a:xfrm>
           <a:prstGeom prst="rect">
             <a:avLst/>
@@ -1715,7 +1715,7 @@
         <p:spPr>
           <a:xfrm>
             <a:off x="457200" y="4160520"/>
-            <a:ext cx="2907792" cy="347472"/>
+            <a:ext cx="653552" cy="347472"/>
           </a:xfrm>
           <a:prstGeom prst="rect">
             <a:avLst/>
@@ -2823,7 +2823,7 @@
               <a:buNone/>
             </a:pPr>
             <a:r>
-              <a:rPr lang="en-US" sz="1800" b="1" dirty="0">
+              <a:rPr lang="en-US" sz="1800" b="0" dirty="0">
                 <a:solidFill>
                   <a:srgbClr val="FF5859"/>
                 </a:solidFill>
@@ -3014,7 +3014,7 @@
               <a:buNone/>
             </a:pPr>
             <a:r>
-              <a:rPr lang="en-US" sz="1800" b="1" dirty="0">
+              <a:rPr lang="en-US" sz="1800" b="0" dirty="0">
                 <a:solidFill>
                   <a:srgbClr val="FF5859"/>
                 </a:solidFill>
@@ -3205,7 +3205,7 @@
               <a:buNone/>
             </a:pPr>
             <a:r>
-              <a:rPr lang="en-US" sz="1800" b="1" dirty="0">
+              <a:rPr lang="en-US" sz="1800" b="0" dirty="0">
                 <a:solidFill>
                   <a:srgbClr val="FF5859"/>
                 </a:solidFill>
@@ -3400,7 +3400,7 @@
               <a:buNone/>
             </a:pPr>
             <a:r>
-              <a:rPr lang="en-US" sz="2800" b="1" dirty="0">
+              <a:rPr lang="en-US" sz="2800" b="0" dirty="0">
                 <a:solidFill>
                   <a:srgbClr val="FFFFFF"/>
                 </a:solidFill>
@@ -3758,7 +3758,7 @@
               <a:buNone/>
             </a:pPr>
             <a:r>
-              <a:rPr lang="en-US" sz="2200" b="1" dirty="0">
+              <a:rPr lang="en-US" sz="2200" b="0" dirty="0">
                 <a:solidFill>
                   <a:srgbClr val="FFFFFF"/>
                 </a:solidFill>
@@ -3962,7 +3962,7 @@
               <a:buNone/>
             </a:pPr>
             <a:r>
-              <a:rPr lang="en-US" sz="2200" b="1" dirty="0">
+              <a:rPr lang="en-US" sz="2200" b="0" dirty="0">
                 <a:solidFill>
                   <a:srgbClr val="FFFFFF"/>
                 </a:solidFill>
@@ -4166,7 +4166,7 @@
               <a:buNone/>
             </a:pPr>
             <a:r>
-              <a:rPr lang="en-US" sz="2200" b="1" dirty="0">
+              <a:rPr lang="en-US" sz="2200" b="0" dirty="0">
                 <a:solidFill>
                   <a:srgbClr val="FFFFFF"/>
                 </a:solidFill>
@@ -4370,7 +4370,7 @@
               <a:buNone/>
             </a:pPr>
             <a:r>
-              <a:rPr lang="en-US" sz="2200" b="1" dirty="0">
+              <a:rPr lang="en-US" sz="2200" b="0" dirty="0">
                 <a:solidFill>
                   <a:srgbClr val="FFFFFF"/>
                 </a:solidFill>

--- a/guided/templates/pptx/通用簡報模板_TEMPLATE.pptx
+++ b/guided/templates/pptx/通用簡報模板_TEMPLATE.pptx
@@ -1008,7 +1008,7 @@
         <p:spPr>
           <a:xfrm>
             <a:off x="457200" y="4160520"/>
-            <a:ext cx="653552" cy="347472"/>
+            <a:ext cx="2902086" cy="347472"/>
           </a:xfrm>
           <a:prstGeom prst="rect">
             <a:avLst/>
@@ -1222,7 +1222,7 @@
         <p:spPr>
           <a:xfrm>
             <a:off x="8229600" y="4663440"/>
-            <a:ext cx="603504" cy="320040"/>
+            <a:ext cx="320040" cy="320040"/>
           </a:xfrm>
           <a:prstGeom prst="rect">
             <a:avLst/>
@@ -1715,7 +1715,7 @@
         <p:spPr>
           <a:xfrm>
             <a:off x="457200" y="4160520"/>
-            <a:ext cx="653552" cy="347472"/>
+            <a:ext cx="2902086" cy="347472"/>
           </a:xfrm>
           <a:prstGeom prst="rect">
             <a:avLst/>
@@ -2285,7 +2285,7 @@
         <p:spPr>
           <a:xfrm>
             <a:off x="8229600" y="4663440"/>
-            <a:ext cx="603504" cy="320040"/>
+            <a:ext cx="320040" cy="320040"/>
           </a:xfrm>
           <a:prstGeom prst="rect">
             <a:avLst/>
@@ -2447,7 +2447,7 @@
         <p:spPr>
           <a:xfrm>
             <a:off x="8229600" y="4663440"/>
-            <a:ext cx="603504" cy="320040"/>
+            <a:ext cx="320040" cy="320040"/>
           </a:xfrm>
           <a:prstGeom prst="rect">
             <a:avLst/>
@@ -2655,7 +2655,7 @@
         <p:spPr>
           <a:xfrm>
             <a:off x="8229600" y="4663440"/>
-            <a:ext cx="603504" cy="320040"/>
+            <a:ext cx="320040" cy="320040"/>
           </a:xfrm>
           <a:prstGeom prst="rect">
             <a:avLst/>
@@ -3326,7 +3326,7 @@
         <p:spPr>
           <a:xfrm>
             <a:off x="8229600" y="4663440"/>
-            <a:ext cx="603504" cy="320040"/>
+            <a:ext cx="320040" cy="320040"/>
           </a:xfrm>
           <a:prstGeom prst="rect">
             <a:avLst/>
@@ -3590,7 +3590,7 @@
         <p:spPr>
           <a:xfrm>
             <a:off x="8229600" y="4663440"/>
-            <a:ext cx="603504" cy="320040"/>
+            <a:ext cx="320040" cy="320040"/>
           </a:xfrm>
           <a:prstGeom prst="rect">
             <a:avLst/>
@@ -4465,7 +4465,7 @@
         <p:spPr>
           <a:xfrm>
             <a:off x="8229600" y="4663440"/>
-            <a:ext cx="603504" cy="320040"/>
+            <a:ext cx="320040" cy="320040"/>
           </a:xfrm>
           <a:prstGeom prst="rect">
             <a:avLst/>
@@ -4822,7 +4822,7 @@
         <p:spPr>
           <a:xfrm>
             <a:off x="8229600" y="4663440"/>
-            <a:ext cx="603504" cy="320040"/>
+            <a:ext cx="320040" cy="320040"/>
           </a:xfrm>
           <a:prstGeom prst="rect">
             <a:avLst/>
@@ -5067,7 +5067,7 @@
         <p:spPr>
           <a:xfrm>
             <a:off x="8229600" y="4663440"/>
-            <a:ext cx="603504" cy="320040"/>
+            <a:ext cx="320040" cy="320040"/>
           </a:xfrm>
           <a:prstGeom prst="rect">
             <a:avLst/>
